--- a/docs/presentaciones/classes/clase-220-metricas-map-k-ndcg-recall-k-presentacion.pptx
+++ b/docs/presentaciones/classes/clase-220-metricas-map-k-ndcg-recall-k-presentacion.pptx
@@ -3272,7 +3272,7 @@
                 </a:solidFill>
                 <a:latin typeface="Segoe UI"/>
               </a:rPr>
-              <a:t>Parte: 6 — Sistemas de Recomendación · Fuente: Aggarwal cap. 7 + Järvelin &amp; Kekäläinen, Cumulated Gain-Based Evaluation of IR Techniques (TOIS 2002 — NDCG paper).  Duración estimada: 70 min.</a:t>
+              <a:t>Parte: 6 — Sistemas de Recomendación · Fuente: Aggarwal cap. 7 + Järvelin &amp; Kekäläinen, Cumulated Gain-Based Evaluation of IR Techniques (TOIS 2002 — NDCG paper).  Duración estimada: 70 min. · Nivel: Intermedio-Avanzado</a:t>
             </a:r>
           </a:p>
         </p:txBody>
@@ -3581,7 +3581,7 @@
                 </a:solidFill>
                 <a:latin typeface="Segoe UI"/>
               </a:rPr>
-              <a:t>Parte: 6 — Sistemas de Recomendación · Fuente: Aggarwal cap. 7 + Järvelin &amp; Kekäläinen, Cumulated Gain-Based Evaluation of IR Techniques (TOIS 2002 — NDCG paper).  Duración estimada: 70 min.</a:t>
+              <a:t>Parte: 6 — Sistemas de Recomendación · Fuente: Aggarwal cap. 7 + Järvelin &amp; Kekäläinen, Cumulated Gain-Based Evaluation of IR Techniques (TOIS 2002 — NDCG paper).  Duración estimada: 70 min. · Nivel: Intermedio-Avanzado</a:t>
             </a:r>
           </a:p>
         </p:txBody>
